--- a/design/pptx-slides/output/ClaudeCodeBusinessSlides.pptx
+++ b/design/pptx-slides/output/ClaudeCodeBusinessSlides.pptx
@@ -1384,20 +1384,14 @@
       </p:sp>
       <p:pic>
         <p:nvPicPr>
-          <p:cNvPr id="4" name="Image 0" descr="C:\Users\Samy Chouaf\Desktop\smart-creator-design-system\assets\illustrations\notion-style\Chatting.svg">    </p:cNvPr>
+          <p:cNvPr id="4" name="Image 0" descr="preencoded.png">    </p:cNvPr>
           <p:cNvPicPr>
             <a:picLocks noChangeAspect="1"/>
           </p:cNvPicPr>
           <p:nvPr/>
         </p:nvPicPr>
         <p:blipFill>
-          <a:blip r:embed="rId1">
-            <a:extLst>
-              <a:ext uri="{96DAC541-7B7A-43D3-8B79-37D633B846F1}">
-                <asvg:svgBlip xmlns:asvg="http://schemas.microsoft.com/office/drawing/2016/SVG/main" r:embed="rId2"/>
-              </a:ext>
-            </a:extLst>
-          </a:blip>
+          <a:blip r:embed="rId1"/>
           <a:stretch>
             <a:fillRect/>
           </a:stretch>
@@ -1496,7 +1490,7 @@
           <p:nvPr/>
         </p:nvPicPr>
         <p:blipFill>
-          <a:blip r:embed="rId3"/>
+          <a:blip r:embed="rId2"/>
           <a:stretch>
             <a:fillRect/>
           </a:stretch>
@@ -2024,20 +2018,14 @@
       </p:sp>
       <p:pic>
         <p:nvPicPr>
-          <p:cNvPr id="12" name="Image 0" descr="C:\Users\Samy Chouaf\Desktop\smart-creator-design-system\assets\icons\business\copy-paste-clipboard--Streamline-Freehand.svg">    </p:cNvPr>
+          <p:cNvPr id="12" name="Image 0" descr="preencoded.png">    </p:cNvPr>
           <p:cNvPicPr>
             <a:picLocks noChangeAspect="1"/>
           </p:cNvPicPr>
           <p:nvPr/>
         </p:nvPicPr>
         <p:blipFill>
-          <a:blip r:embed="rId1">
-            <a:extLst>
-              <a:ext uri="{96DAC541-7B7A-43D3-8B79-37D633B846F1}">
-                <asvg:svgBlip xmlns:asvg="http://schemas.microsoft.com/office/drawing/2016/SVG/main" r:embed="rId2"/>
-              </a:ext>
-            </a:extLst>
-          </a:blip>
+          <a:blip r:embed="rId1"/>
           <a:stretch>
             <a:fillRect/>
           </a:stretch>
@@ -2359,20 +2347,14 @@
       </p:sp>
       <p:pic>
         <p:nvPicPr>
-          <p:cNvPr id="22" name="Image 1" descr="C:\Users\Samy Chouaf\Desktop\smart-creator-design-system\assets\icons\programming-apps-websites\database-settings--Streamline-Freehand.svg">    </p:cNvPr>
+          <p:cNvPr id="22" name="Image 1" descr="preencoded.png">    </p:cNvPr>
           <p:cNvPicPr>
             <a:picLocks noChangeAspect="1"/>
           </p:cNvPicPr>
           <p:nvPr/>
         </p:nvPicPr>
         <p:blipFill>
-          <a:blip r:embed="rId3">
-            <a:extLst>
-              <a:ext uri="{96DAC541-7B7A-43D3-8B79-37D633B846F1}">
-                <asvg:svgBlip xmlns:asvg="http://schemas.microsoft.com/office/drawing/2016/SVG/main" r:embed="rId4"/>
-              </a:ext>
-            </a:extLst>
-          </a:blip>
+          <a:blip r:embed="rId2"/>
           <a:stretch>
             <a:fillRect/>
           </a:stretch>
@@ -2925,20 +2907,14 @@
       </p:sp>
       <p:pic>
         <p:nvPicPr>
-          <p:cNvPr id="9" name="Image 0" descr="C:\Users\Samy Chouaf\Desktop\smart-creator-design-system\assets\icons\business\time-stopwatch--Streamline-Freehand.svg">    </p:cNvPr>
+          <p:cNvPr id="9" name="Image 0" descr="preencoded.png">    </p:cNvPr>
           <p:cNvPicPr>
             <a:picLocks noChangeAspect="1"/>
           </p:cNvPicPr>
           <p:nvPr/>
         </p:nvPicPr>
         <p:blipFill>
-          <a:blip r:embed="rId1">
-            <a:extLst>
-              <a:ext uri="{96DAC541-7B7A-43D3-8B79-37D633B846F1}">
-                <asvg:svgBlip xmlns:asvg="http://schemas.microsoft.com/office/drawing/2016/SVG/main" r:embed="rId2"/>
-              </a:ext>
-            </a:extLst>
-          </a:blip>
+          <a:blip r:embed="rId1"/>
           <a:stretch>
             <a:fillRect/>
           </a:stretch>
@@ -3125,20 +3101,14 @@
       </p:sp>
       <p:pic>
         <p:nvPicPr>
-          <p:cNvPr id="15" name="Image 1" descr="C:\Users\Samy Chouaf\Desktop\smart-creator-design-system\assets\icons\programming-apps-websites\database-settings--Streamline-Freehand.svg">    </p:cNvPr>
+          <p:cNvPr id="15" name="Image 1" descr="preencoded.png">    </p:cNvPr>
           <p:cNvPicPr>
             <a:picLocks noChangeAspect="1"/>
           </p:cNvPicPr>
           <p:nvPr/>
         </p:nvPicPr>
         <p:blipFill>
-          <a:blip r:embed="rId3">
-            <a:extLst>
-              <a:ext uri="{96DAC541-7B7A-43D3-8B79-37D633B846F1}">
-                <asvg:svgBlip xmlns:asvg="http://schemas.microsoft.com/office/drawing/2016/SVG/main" r:embed="rId4"/>
-              </a:ext>
-            </a:extLst>
-          </a:blip>
+          <a:blip r:embed="rId2"/>
           <a:stretch>
             <a:fillRect/>
           </a:stretch>
@@ -3325,20 +3295,14 @@
       </p:sp>
       <p:pic>
         <p:nvPicPr>
-          <p:cNvPr id="21" name="Image 2" descr="C:\Users\Samy Chouaf\Desktop\smart-creator-design-system\assets\icons\work-office\task-list-clipboard-check--Streamline-Freehand.svg">    </p:cNvPr>
+          <p:cNvPr id="21" name="Image 2" descr="preencoded.png">    </p:cNvPr>
           <p:cNvPicPr>
             <a:picLocks noChangeAspect="1"/>
           </p:cNvPicPr>
           <p:nvPr/>
         </p:nvPicPr>
         <p:blipFill>
-          <a:blip r:embed="rId5">
-            <a:extLst>
-              <a:ext uri="{96DAC541-7B7A-43D3-8B79-37D633B846F1}">
-                <asvg:svgBlip xmlns:asvg="http://schemas.microsoft.com/office/drawing/2016/SVG/main" r:embed="rId6"/>
-              </a:ext>
-            </a:extLst>
-          </a:blip>
+          <a:blip r:embed="rId3"/>
           <a:stretch>
             <a:fillRect/>
           </a:stretch>
@@ -3683,20 +3647,14 @@
       </p:sp>
       <p:pic>
         <p:nvPicPr>
-          <p:cNvPr id="8" name="Image 0" descr="C:\Users\Samy Chouaf\Desktop\smart-creator-design-system\assets\icons\business\calendar-grid--Streamline-Freehand.svg">    </p:cNvPr>
+          <p:cNvPr id="8" name="Image 0" descr="preencoded.png">    </p:cNvPr>
           <p:cNvPicPr>
             <a:picLocks noChangeAspect="1"/>
           </p:cNvPicPr>
           <p:nvPr/>
         </p:nvPicPr>
         <p:blipFill>
-          <a:blip r:embed="rId1">
-            <a:extLst>
-              <a:ext uri="{96DAC541-7B7A-43D3-8B79-37D633B846F1}">
-                <asvg:svgBlip xmlns:asvg="http://schemas.microsoft.com/office/drawing/2016/SVG/main" r:embed="rId2"/>
-              </a:ext>
-            </a:extLst>
-          </a:blip>
+          <a:blip r:embed="rId1"/>
           <a:stretch>
             <a:fillRect/>
           </a:stretch>
@@ -3931,20 +3889,14 @@
       </p:sp>
       <p:pic>
         <p:nvPicPr>
-          <p:cNvPr id="15" name="Image 1" descr="C:\Users\Samy Chouaf\Desktop\smart-creator-design-system\assets\icons\design\content-brush-pen--Streamline-Freehand.svg">    </p:cNvPr>
+          <p:cNvPr id="15" name="Image 1" descr="preencoded.png">    </p:cNvPr>
           <p:cNvPicPr>
             <a:picLocks noChangeAspect="1"/>
           </p:cNvPicPr>
           <p:nvPr/>
         </p:nvPicPr>
         <p:blipFill>
-          <a:blip r:embed="rId3">
-            <a:extLst>
-              <a:ext uri="{96DAC541-7B7A-43D3-8B79-37D633B846F1}">
-                <asvg:svgBlip xmlns:asvg="http://schemas.microsoft.com/office/drawing/2016/SVG/main" r:embed="rId4"/>
-              </a:ext>
-            </a:extLst>
-          </a:blip>
+          <a:blip r:embed="rId2"/>
           <a:stretch>
             <a:fillRect/>
           </a:stretch>
@@ -4179,20 +4131,14 @@
       </p:sp>
       <p:pic>
         <p:nvPicPr>
-          <p:cNvPr id="22" name="Image 2" descr="C:\Users\Samy Chouaf\Desktop\smart-creator-design-system\assets\icons\data\analytics-board-graph-line--Streamline-Freehand.svg">    </p:cNvPr>
+          <p:cNvPr id="22" name="Image 2" descr="preencoded.png">    </p:cNvPr>
           <p:cNvPicPr>
             <a:picLocks noChangeAspect="1"/>
           </p:cNvPicPr>
           <p:nvPr/>
         </p:nvPicPr>
         <p:blipFill>
-          <a:blip r:embed="rId5">
-            <a:extLst>
-              <a:ext uri="{96DAC541-7B7A-43D3-8B79-37D633B846F1}">
-                <asvg:svgBlip xmlns:asvg="http://schemas.microsoft.com/office/drawing/2016/SVG/main" r:embed="rId6"/>
-              </a:ext>
-            </a:extLst>
-          </a:blip>
+          <a:blip r:embed="rId3"/>
           <a:stretch>
             <a:fillRect/>
           </a:stretch>
